--- a/public/level3/downloads/slides/Level3_Lesson4_Slides.pptx
+++ b/public/level3/downloads/slides/Level3_Lesson4_Slides.pptx
@@ -1192,7 +1192,7 @@
           </a:p>
           <a:p>
             <a:r>
-              <a:t>The audio (about 1:18) is coming soon. When it is ready, it plays the conversation once; press play again for play 2. Until then, read the listening script (at the end of these notes) with a volunteer.</a:t>
+              <a:t>The audio (L3_L4_listening.mp3, about 1:18) plays the conversation once. Press play again for play 2. A third play is fine if the class needs it.</a:t>
             </a:r>
           </a:p>
           <a:p>
@@ -1202,7 +1202,7 @@
           </a:p>
           <a:p>
             <a:r>
-              <a:t>Audio: the listening audio for this lesson (about 1:18) is coming soon. It will use computer-generated voices (Chatterbox TTS cloned from synthetic Kokoro-82M reference clips); no recordings of real people. Until it is ready, read the listening script (in the notes of the Before You Listen slide) with a volunteer. The names and the story are invented.</a:t>
+              <a:t>Audio: synthetic voices, computer-generated (Chatterbox TTS cloned from Kokoro-82M reference clips). No recordings of real people. The names and the story are invented.</a:t>
             </a:r>
           </a:p>
           <a:p>
@@ -1213,101 +1213,6 @@
           <a:p>
             <a:r>
               <a:t>Picture: Twemoji graphics by Twitter, Inc. and other contributors (https://github.com/jdecked/twemoji), CC BY 4.0 (https://creativecommons.org/licenses/by/4.0/); resized and combined, with speech bubbles, signs, and labels (images/CREDITS.md).</a:t>
-            </a:r>
-          </a:p>
-          <a:p>
-            <a:r>
-              <a:t>Listening script (the audio is coming soon; until then, read it aloud with a volunteer at a normal, friendly speed):</a:t>
-            </a:r>
-          </a:p>
-          <a:p>
-            <a:r>
-              <a:t>Narrator: Lesson four. Listening. Elena had a small car accident. Now she's calling her insurance company. Listen.</a:t>
-            </a:r>
-          </a:p>
-          <a:p>
-            <a:r>
-              <a:t>Mark: Safe Road Insurance, this is Mark. How can I help you?</a:t>
-            </a:r>
-          </a:p>
-          <a:p>
-            <a:r>
-              <a:t>Elena: Hi, this is Elena Ramos. I had a small car accident this morning.</a:t>
-            </a:r>
-          </a:p>
-          <a:p>
-            <a:r>
-              <a:t>Mark: I'm sorry to hear that. Was anyone hurt?</a:t>
-            </a:r>
-          </a:p>
-          <a:p>
-            <a:r>
-              <a:t>Elena: No, everyone was OK. But my car has a dent.</a:t>
-            </a:r>
-          </a:p>
-          <a:p>
-            <a:r>
-              <a:t>Mark: Where did it happen?</a:t>
-            </a:r>
-          </a:p>
-          <a:p>
-            <a:r>
-              <a:t>Elena: At the intersection of Oak Street and Second Avenue.</a:t>
-            </a:r>
-          </a:p>
-          <a:p>
-            <a:r>
-              <a:t>Mark: What were you doing when it happened?</a:t>
-            </a:r>
-          </a:p>
-          <a:p>
-            <a:r>
-              <a:t>Elena: I was driving to work. The light was red, so I stopped.</a:t>
-            </a:r>
-          </a:p>
-          <a:p>
-            <a:r>
-              <a:t>Mark: And what was the other driver doing?</a:t>
-            </a:r>
-          </a:p>
-          <a:p>
-            <a:r>
-              <a:t>Elena: He was talking on his phone. He wasn't looking, and he hit my car.</a:t>
-            </a:r>
-          </a:p>
-          <a:p>
-            <a:r>
-              <a:t>Mark: Did anyone see the accident?</a:t>
-            </a:r>
-          </a:p>
-          <a:p>
-            <a:r>
-              <a:t>Elena: Yes. Two people were crossing the street. One woman gave me her phone number.</a:t>
-            </a:r>
-          </a:p>
-          <a:p>
-            <a:r>
-              <a:t>Mark: Good. Did the police come?</a:t>
-            </a:r>
-          </a:p>
-          <a:p>
-            <a:r>
-              <a:t>Elena: Yes. A police officer came and wrote a report.</a:t>
-            </a:r>
-          </a:p>
-          <a:p>
-            <a:r>
-              <a:t>Mark: OK. Please send me the report number today.</a:t>
-            </a:r>
-          </a:p>
-          <a:p>
-            <a:r>
-              <a:t>Elena: I will. Thank you for your help.</a:t>
-            </a:r>
-          </a:p>
-          <a:p>
-            <a:r>
-              <a:t>Narrator: That's the end of the listening.</a:t>
             </a:r>
           </a:p>
         </p:txBody>
@@ -2912,7 +2817,7 @@
           </a:p>
           <a:p>
             <a:r>
-              <a:t>Audio: the listening audio for this lesson (about 1:18) is coming soon. It will use computer-generated voices (Chatterbox TTS cloned from synthetic Kokoro-82M reference clips); no recordings of real people. Until it is ready, read the listening script (in the notes of the Before You Listen slide) with a volunteer. The names and the story are invented.</a:t>
+              <a:t>Audio: synthetic voices, computer-generated (Chatterbox TTS cloned from Kokoro-82M reference clips). No recordings of real people. The names and the story are invented.</a:t>
             </a:r>
           </a:p>
           <a:p>
@@ -32692,7 +32597,7 @@
                 <a:ea typeface="Lexend Deca" pitchFamily="34" charset="-122"/>
                 <a:cs typeface="Lexend Deca" pitchFamily="34" charset="-120"/>
               </a:rPr>
-              <a:t>Audio (coming soon): synthetic voices made with Chatterbox TTS (MIT License), cloned from short synthetic reference clips made with Kokoro-82M (Apache License 2.0). No recordings of real people. Each file will carry an inaudible Perth watermark marking it as AI-generated. Font: Lexend Deca (OFL 1.1).</a:t>
+              <a:t>Audio: synthetic voices made with Chatterbox TTS (MIT License), cloned from short synthetic reference clips made with Kokoro-82M (Apache License 2.0). No recordings of real people were used. Each file carries an inaudible Perth watermark marking it as AI-generated. Font: Lexend Deca (OFL 1.1).</a:t>
             </a:r>
             <a:endParaRPr lang="en-US" sz="1350" dirty="0" b="0"/>
           </a:p>
